--- a/lessons/3-6/slides.pptx
+++ b/lessons/3-6/slides.pptx
@@ -10684,7 +10684,7 @@
       </p:sp>
       <p:sp>
         <p:nvSpPr>
-          <p:cNvPr id="20" name="Shape 18"/>
+          <p:cNvPr id="20" name="Text 18"/>
           <p:cNvSpPr/>
           <p:nvPr/>
         </p:nvSpPr>
@@ -10705,33 +10705,7 @@
             <a:solidFill>
               <a:srgbClr val="D6DBDF"/>
             </a:solidFill>
-            <a:prstDash val="solid"/>
           </a:ln>
-          <a:effectLst>
-            <a:outerShdw sx="100000" sy="100000" kx="0" ky="0" algn="bl" rotWithShape="0" blurRad="50800" dist="12700" dir="5400000">
-              <a:srgbClr val="1C2E42">
-                <a:alpha val="10000"/>
-              </a:srgbClr>
-            </a:outerShdw>
-          </a:effectLst>
-        </p:spPr>
-      </p:sp>
-      <p:sp>
-        <p:nvSpPr>
-          <p:cNvPr id="21" name="Text 19"/>
-          <p:cNvSpPr/>
-          <p:nvPr/>
-        </p:nvSpPr>
-        <p:spPr>
-          <a:xfrm>
-            <a:off x="685800" y="1481328"/>
-            <a:ext cx="1447800" cy="384048"/>
-          </a:xfrm>
-          <a:prstGeom prst="rect">
-            <a:avLst/>
-          </a:prstGeom>
-          <a:noFill/>
-          <a:ln/>
         </p:spPr>
         <p:txBody>
           <a:bodyPr wrap="square" rtlCol="0" anchor="ctr"/>
@@ -10741,7 +10715,7 @@
               <a:buNone/>
             </a:pPr>
             <a:r>
-              <a:rPr lang="en-US" sz="900" dirty="0">
+              <a:rPr lang="en-US" sz="900" b="1" dirty="0">
                 <a:solidFill>
                   <a:srgbClr val="17324D"/>
                 </a:solidFill>
@@ -10757,7 +10731,7 @@
       </p:sp>
       <p:sp>
         <p:nvSpPr>
-          <p:cNvPr id="22" name="Shape 20"/>
+          <p:cNvPr id="21" name="Text 19"/>
           <p:cNvSpPr/>
           <p:nvPr/>
         </p:nvSpPr>
@@ -10778,33 +10752,7 @@
             <a:solidFill>
               <a:srgbClr val="D6DBDF"/>
             </a:solidFill>
-            <a:prstDash val="solid"/>
           </a:ln>
-          <a:effectLst>
-            <a:outerShdw sx="100000" sy="100000" kx="0" ky="0" algn="bl" rotWithShape="0" blurRad="50800" dist="12700" dir="5400000">
-              <a:srgbClr val="1C2E42">
-                <a:alpha val="10000"/>
-              </a:srgbClr>
-            </a:outerShdw>
-          </a:effectLst>
-        </p:spPr>
-      </p:sp>
-      <p:sp>
-        <p:nvSpPr>
-          <p:cNvPr id="23" name="Text 21"/>
-          <p:cNvSpPr/>
-          <p:nvPr/>
-        </p:nvSpPr>
-        <p:spPr>
-          <a:xfrm>
-            <a:off x="2453640" y="1481328"/>
-            <a:ext cx="1447800" cy="384048"/>
-          </a:xfrm>
-          <a:prstGeom prst="rect">
-            <a:avLst/>
-          </a:prstGeom>
-          <a:noFill/>
-          <a:ln/>
         </p:spPr>
         <p:txBody>
           <a:bodyPr wrap="square" rtlCol="0" anchor="ctr"/>
@@ -10814,7 +10762,7 @@
               <a:buNone/>
             </a:pPr>
             <a:r>
-              <a:rPr lang="en-US" sz="900" dirty="0">
+              <a:rPr lang="en-US" sz="900" b="1" dirty="0">
                 <a:solidFill>
                   <a:srgbClr val="17324D"/>
                 </a:solidFill>
@@ -10830,7 +10778,7 @@
       </p:sp>
       <p:sp>
         <p:nvSpPr>
-          <p:cNvPr id="24" name="Shape 22"/>
+          <p:cNvPr id="22" name="Text 20"/>
           <p:cNvSpPr/>
           <p:nvPr/>
         </p:nvSpPr>
@@ -10851,33 +10799,7 @@
             <a:solidFill>
               <a:srgbClr val="D6DBDF"/>
             </a:solidFill>
-            <a:prstDash val="solid"/>
           </a:ln>
-          <a:effectLst>
-            <a:outerShdw sx="100000" sy="100000" kx="0" ky="0" algn="bl" rotWithShape="0" blurRad="50800" dist="12700" dir="5400000">
-              <a:srgbClr val="1C2E42">
-                <a:alpha val="10000"/>
-              </a:srgbClr>
-            </a:outerShdw>
-          </a:effectLst>
-        </p:spPr>
-      </p:sp>
-      <p:sp>
-        <p:nvSpPr>
-          <p:cNvPr id="25" name="Text 23"/>
-          <p:cNvSpPr/>
-          <p:nvPr/>
-        </p:nvSpPr>
-        <p:spPr>
-          <a:xfrm>
-            <a:off x="4221480" y="1481328"/>
-            <a:ext cx="1447800" cy="384048"/>
-          </a:xfrm>
-          <a:prstGeom prst="rect">
-            <a:avLst/>
-          </a:prstGeom>
-          <a:noFill/>
-          <a:ln/>
         </p:spPr>
         <p:txBody>
           <a:bodyPr wrap="square" rtlCol="0" anchor="ctr"/>
@@ -10887,7 +10809,7 @@
               <a:buNone/>
             </a:pPr>
             <a:r>
-              <a:rPr lang="en-US" sz="900" dirty="0">
+              <a:rPr lang="en-US" sz="900" b="1" dirty="0">
                 <a:solidFill>
                   <a:srgbClr val="17324D"/>
                 </a:solidFill>
@@ -10903,7 +10825,7 @@
       </p:sp>
       <p:sp>
         <p:nvSpPr>
-          <p:cNvPr id="26" name="Shape 24"/>
+          <p:cNvPr id="23" name="Text 21"/>
           <p:cNvSpPr/>
           <p:nvPr/>
         </p:nvSpPr>
@@ -10924,33 +10846,7 @@
             <a:solidFill>
               <a:srgbClr val="D6DBDF"/>
             </a:solidFill>
-            <a:prstDash val="solid"/>
           </a:ln>
-          <a:effectLst>
-            <a:outerShdw sx="100000" sy="100000" kx="0" ky="0" algn="bl" rotWithShape="0" blurRad="50800" dist="12700" dir="5400000">
-              <a:srgbClr val="1C2E42">
-                <a:alpha val="10000"/>
-              </a:srgbClr>
-            </a:outerShdw>
-          </a:effectLst>
-        </p:spPr>
-      </p:sp>
-      <p:sp>
-        <p:nvSpPr>
-          <p:cNvPr id="27" name="Text 25"/>
-          <p:cNvSpPr/>
-          <p:nvPr/>
-        </p:nvSpPr>
-        <p:spPr>
-          <a:xfrm>
-            <a:off x="685800" y="1975104"/>
-            <a:ext cx="1447800" cy="384048"/>
-          </a:xfrm>
-          <a:prstGeom prst="rect">
-            <a:avLst/>
-          </a:prstGeom>
-          <a:noFill/>
-          <a:ln/>
         </p:spPr>
         <p:txBody>
           <a:bodyPr wrap="square" rtlCol="0" anchor="ctr"/>
@@ -10960,7 +10856,7 @@
               <a:buNone/>
             </a:pPr>
             <a:r>
-              <a:rPr lang="en-US" sz="900" dirty="0">
+              <a:rPr lang="en-US" sz="900" b="1" dirty="0">
                 <a:solidFill>
                   <a:srgbClr val="17324D"/>
                 </a:solidFill>
@@ -10976,7 +10872,7 @@
       </p:sp>
       <p:sp>
         <p:nvSpPr>
-          <p:cNvPr id="28" name="Shape 26"/>
+          <p:cNvPr id="24" name="Text 22"/>
           <p:cNvSpPr/>
           <p:nvPr/>
         </p:nvSpPr>
@@ -10997,33 +10893,7 @@
             <a:solidFill>
               <a:srgbClr val="D6DBDF"/>
             </a:solidFill>
-            <a:prstDash val="solid"/>
           </a:ln>
-          <a:effectLst>
-            <a:outerShdw sx="100000" sy="100000" kx="0" ky="0" algn="bl" rotWithShape="0" blurRad="50800" dist="12700" dir="5400000">
-              <a:srgbClr val="1C2E42">
-                <a:alpha val="10000"/>
-              </a:srgbClr>
-            </a:outerShdw>
-          </a:effectLst>
-        </p:spPr>
-      </p:sp>
-      <p:sp>
-        <p:nvSpPr>
-          <p:cNvPr id="29" name="Text 27"/>
-          <p:cNvSpPr/>
-          <p:nvPr/>
-        </p:nvSpPr>
-        <p:spPr>
-          <a:xfrm>
-            <a:off x="2453640" y="1975104"/>
-            <a:ext cx="1447800" cy="384048"/>
-          </a:xfrm>
-          <a:prstGeom prst="rect">
-            <a:avLst/>
-          </a:prstGeom>
-          <a:noFill/>
-          <a:ln/>
         </p:spPr>
         <p:txBody>
           <a:bodyPr wrap="square" rtlCol="0" anchor="ctr"/>
@@ -11033,7 +10903,7 @@
               <a:buNone/>
             </a:pPr>
             <a:r>
-              <a:rPr lang="en-US" sz="900" dirty="0">
+              <a:rPr lang="en-US" sz="900" b="1" dirty="0">
                 <a:solidFill>
                   <a:srgbClr val="17324D"/>
                 </a:solidFill>
@@ -11049,7 +10919,7 @@
       </p:sp>
       <p:sp>
         <p:nvSpPr>
-          <p:cNvPr id="30" name="Shape 28"/>
+          <p:cNvPr id="25" name="Text 23"/>
           <p:cNvSpPr/>
           <p:nvPr/>
         </p:nvSpPr>
@@ -11070,33 +10940,7 @@
             <a:solidFill>
               <a:srgbClr val="D6DBDF"/>
             </a:solidFill>
-            <a:prstDash val="solid"/>
           </a:ln>
-          <a:effectLst>
-            <a:outerShdw sx="100000" sy="100000" kx="0" ky="0" algn="bl" rotWithShape="0" blurRad="50800" dist="12700" dir="5400000">
-              <a:srgbClr val="1C2E42">
-                <a:alpha val="10000"/>
-              </a:srgbClr>
-            </a:outerShdw>
-          </a:effectLst>
-        </p:spPr>
-      </p:sp>
-      <p:sp>
-        <p:nvSpPr>
-          <p:cNvPr id="31" name="Text 29"/>
-          <p:cNvSpPr/>
-          <p:nvPr/>
-        </p:nvSpPr>
-        <p:spPr>
-          <a:xfrm>
-            <a:off x="4221480" y="1975104"/>
-            <a:ext cx="1447800" cy="384048"/>
-          </a:xfrm>
-          <a:prstGeom prst="rect">
-            <a:avLst/>
-          </a:prstGeom>
-          <a:noFill/>
-          <a:ln/>
         </p:spPr>
         <p:txBody>
           <a:bodyPr wrap="square" rtlCol="0" anchor="ctr"/>
@@ -11106,7 +10950,7 @@
               <a:buNone/>
             </a:pPr>
             <a:r>
-              <a:rPr lang="en-US" sz="900" dirty="0">
+              <a:rPr lang="en-US" sz="900" b="1" dirty="0">
                 <a:solidFill>
                   <a:srgbClr val="17324D"/>
                 </a:solidFill>
@@ -11122,7 +10966,7 @@
       </p:sp>
       <p:sp>
         <p:nvSpPr>
-          <p:cNvPr id="32" name="Shape 30"/>
+          <p:cNvPr id="26" name="Shape 24"/>
           <p:cNvSpPr/>
           <p:nvPr/>
         </p:nvSpPr>
@@ -11156,7 +11000,7 @@
       </p:sp>
       <p:sp>
         <p:nvSpPr>
-          <p:cNvPr id="33" name="Text 31"/>
+          <p:cNvPr id="27" name="Text 25"/>
           <p:cNvSpPr/>
           <p:nvPr/>
         </p:nvSpPr>
@@ -11197,7 +11041,7 @@
       </p:sp>
       <p:sp>
         <p:nvSpPr>
-          <p:cNvPr id="34" name="Shape 32"/>
+          <p:cNvPr id="28" name="Shape 26"/>
           <p:cNvSpPr/>
           <p:nvPr/>
         </p:nvSpPr>
@@ -11231,7 +11075,7 @@
       </p:sp>
       <p:sp>
         <p:nvSpPr>
-          <p:cNvPr id="35" name="Text 33"/>
+          <p:cNvPr id="29" name="Text 27"/>
           <p:cNvSpPr/>
           <p:nvPr/>
         </p:nvSpPr>
@@ -11272,7 +11116,7 @@
       </p:sp>
       <p:sp>
         <p:nvSpPr>
-          <p:cNvPr id="36" name="Shape 34"/>
+          <p:cNvPr id="30" name="Shape 28"/>
           <p:cNvSpPr/>
           <p:nvPr/>
         </p:nvSpPr>
@@ -11306,7 +11150,7 @@
       </p:sp>
       <p:sp>
         <p:nvSpPr>
-          <p:cNvPr id="37" name="Text 35"/>
+          <p:cNvPr id="31" name="Text 29"/>
           <p:cNvSpPr/>
           <p:nvPr/>
         </p:nvSpPr>
@@ -11347,7 +11191,7 @@
       </p:sp>
       <p:sp>
         <p:nvSpPr>
-          <p:cNvPr id="38" name="Text 36"/>
+          <p:cNvPr id="32" name="Text 30"/>
           <p:cNvSpPr/>
           <p:nvPr/>
         </p:nvSpPr>
@@ -11386,7 +11230,7 @@
       </p:sp>
       <p:sp>
         <p:nvSpPr>
-          <p:cNvPr id="39" name="Shape 37"/>
+          <p:cNvPr id="33" name="Shape 31"/>
           <p:cNvSpPr/>
           <p:nvPr/>
         </p:nvSpPr>
@@ -11409,7 +11253,7 @@
       </p:sp>
       <p:sp>
         <p:nvSpPr>
-          <p:cNvPr id="40" name="Shape 38"/>
+          <p:cNvPr id="34" name="Shape 32"/>
           <p:cNvSpPr/>
           <p:nvPr/>
         </p:nvSpPr>
@@ -11432,7 +11276,7 @@
       </p:sp>
       <p:sp>
         <p:nvSpPr>
-          <p:cNvPr id="41" name="Shape 39"/>
+          <p:cNvPr id="35" name="Shape 33"/>
           <p:cNvSpPr/>
           <p:nvPr/>
         </p:nvSpPr>
@@ -11455,7 +11299,7 @@
       </p:sp>
       <p:sp>
         <p:nvSpPr>
-          <p:cNvPr id="42" name="Shape 40"/>
+          <p:cNvPr id="36" name="Shape 34"/>
           <p:cNvSpPr/>
           <p:nvPr/>
         </p:nvSpPr>
@@ -11478,7 +11322,7 @@
       </p:sp>
       <p:sp>
         <p:nvSpPr>
-          <p:cNvPr id="43" name="Shape 41"/>
+          <p:cNvPr id="37" name="Shape 35"/>
           <p:cNvSpPr/>
           <p:nvPr/>
         </p:nvSpPr>

--- a/lessons/3-6/slides.pptx
+++ b/lessons/3-6/slides.pptx
@@ -2495,7 +2495,7 @@
                 <a:ea typeface="Outfit" pitchFamily="34" charset="-122"/>
                 <a:cs typeface="Outfit" pitchFamily="34" charset="-120"/>
               </a:rPr>
-              <a:t>6.RP.3</a:t>
+              <a:t>6.AT.3</a:t>
             </a:r>
             <a:endParaRPr lang="en-US" sz="1000" dirty="0"/>
           </a:p>
@@ -3218,7 +3218,7 @@
                 <a:ea typeface="Outfit" pitchFamily="34" charset="-122"/>
                 <a:cs typeface="Outfit" pitchFamily="34" charset="-120"/>
               </a:rPr>
-              <a:t>6.RP.3</a:t>
+              <a:t>6.AT.3</a:t>
             </a:r>
             <a:endParaRPr lang="en-US" sz="900" dirty="0"/>
           </a:p>
@@ -4422,7 +4422,7 @@
                 <a:ea typeface="Outfit" pitchFamily="34" charset="-122"/>
                 <a:cs typeface="Outfit" pitchFamily="34" charset="-120"/>
               </a:rPr>
-              <a:t>6.RP.3</a:t>
+              <a:t>6.AT.3</a:t>
             </a:r>
             <a:endParaRPr lang="en-US" sz="900" dirty="0"/>
           </a:p>
@@ -5758,7 +5758,7 @@
                 <a:ea typeface="Outfit" pitchFamily="34" charset="-122"/>
                 <a:cs typeface="Outfit" pitchFamily="34" charset="-120"/>
               </a:rPr>
-              <a:t>6.RP.3</a:t>
+              <a:t>6.AT.3</a:t>
             </a:r>
             <a:endParaRPr lang="en-US" sz="900" dirty="0"/>
           </a:p>
@@ -7052,7 +7052,7 @@
                 <a:ea typeface="Outfit" pitchFamily="34" charset="-122"/>
                 <a:cs typeface="Outfit" pitchFamily="34" charset="-120"/>
               </a:rPr>
-              <a:t>6.RP.3</a:t>
+              <a:t>6.AT.3</a:t>
             </a:r>
             <a:endParaRPr lang="en-US" sz="900" dirty="0"/>
           </a:p>
@@ -8114,7 +8114,7 @@
                 <a:ea typeface="Outfit" pitchFamily="34" charset="-122"/>
                 <a:cs typeface="Outfit" pitchFamily="34" charset="-120"/>
               </a:rPr>
-              <a:t>6.RP.3</a:t>
+              <a:t>6.AT.3</a:t>
             </a:r>
             <a:endParaRPr lang="en-US" sz="900" dirty="0"/>
           </a:p>
@@ -9079,7 +9079,7 @@
                 <a:ea typeface="Outfit" pitchFamily="34" charset="-122"/>
                 <a:cs typeface="Outfit" pitchFamily="34" charset="-120"/>
               </a:rPr>
-              <a:t>6.RP.3</a:t>
+              <a:t>6.AT.3</a:t>
             </a:r>
             <a:endParaRPr lang="en-US" sz="900" dirty="0"/>
           </a:p>
@@ -9996,7 +9996,7 @@
                 <a:ea typeface="Outfit" pitchFamily="34" charset="-122"/>
                 <a:cs typeface="Outfit" pitchFamily="34" charset="-120"/>
               </a:rPr>
-              <a:t>6.RP.3</a:t>
+              <a:t>6.AT.3</a:t>
             </a:r>
             <a:endParaRPr lang="en-US" sz="900" dirty="0"/>
           </a:p>
@@ -11124,7 +11124,7 @@
                 <a:ea typeface="Outfit" pitchFamily="34" charset="-122"/>
                 <a:cs typeface="Outfit" pitchFamily="34" charset="-120"/>
               </a:rPr>
-              <a:t>6.RP.3</a:t>
+              <a:t>6.AT.3</a:t>
             </a:r>
             <a:endParaRPr lang="en-US" sz="900" dirty="0"/>
           </a:p>
@@ -12557,7 +12557,7 @@
                 <a:ea typeface="Outfit" pitchFamily="34" charset="-122"/>
                 <a:cs typeface="Outfit" pitchFamily="34" charset="-120"/>
               </a:rPr>
-              <a:t>6.RP.3</a:t>
+              <a:t>6.AT.3</a:t>
             </a:r>
             <a:endParaRPr lang="en-US" sz="900" dirty="0"/>
           </a:p>
@@ -13371,7 +13371,7 @@
                 <a:ea typeface="Outfit" pitchFamily="34" charset="-122"/>
                 <a:cs typeface="Outfit" pitchFamily="34" charset="-120"/>
               </a:rPr>
-              <a:t>6.RP.3</a:t>
+              <a:t>6.AT.3</a:t>
             </a:r>
             <a:endParaRPr lang="en-US" sz="900" dirty="0"/>
           </a:p>
@@ -14478,7 +14478,7 @@
                 <a:ea typeface="Outfit" pitchFamily="34" charset="-122"/>
                 <a:cs typeface="Outfit" pitchFamily="34" charset="-120"/>
               </a:rPr>
-              <a:t>6.RP.3</a:t>
+              <a:t>6.AT.3</a:t>
             </a:r>
             <a:endParaRPr lang="en-US" sz="900" dirty="0"/>
           </a:p>
@@ -15585,7 +15585,7 @@
                 <a:ea typeface="Outfit" pitchFamily="34" charset="-122"/>
                 <a:cs typeface="Outfit" pitchFamily="34" charset="-120"/>
               </a:rPr>
-              <a:t>6.RP.3</a:t>
+              <a:t>6.AT.3</a:t>
             </a:r>
             <a:endParaRPr lang="en-US" sz="900" dirty="0"/>
           </a:p>
@@ -16692,7 +16692,7 @@
                 <a:ea typeface="Outfit" pitchFamily="34" charset="-122"/>
                 <a:cs typeface="Outfit" pitchFamily="34" charset="-120"/>
               </a:rPr>
-              <a:t>6.RP.3</a:t>
+              <a:t>6.AT.3</a:t>
             </a:r>
             <a:endParaRPr lang="en-US" sz="900" dirty="0"/>
           </a:p>
@@ -17752,7 +17752,7 @@
                 <a:ea typeface="Outfit" pitchFamily="34" charset="-122"/>
                 <a:cs typeface="Outfit" pitchFamily="34" charset="-120"/>
               </a:rPr>
-              <a:t>6.RP.3</a:t>
+              <a:t>6.AT.3</a:t>
             </a:r>
             <a:endParaRPr lang="en-US" sz="900" dirty="0"/>
           </a:p>
@@ -18740,7 +18740,7 @@
                 <a:ea typeface="Outfit" pitchFamily="34" charset="-122"/>
                 <a:cs typeface="Outfit" pitchFamily="34" charset="-120"/>
               </a:rPr>
-              <a:t>6.RP.3</a:t>
+              <a:t>6.AT.3</a:t>
             </a:r>
             <a:endParaRPr lang="en-US" sz="900" dirty="0"/>
           </a:p>
@@ -20678,7 +20678,7 @@
                 <a:ea typeface="Outfit" pitchFamily="34" charset="-122"/>
                 <a:cs typeface="Outfit" pitchFamily="34" charset="-120"/>
               </a:rPr>
-              <a:t>6.RP.3</a:t>
+              <a:t>6.AT.3</a:t>
             </a:r>
             <a:endParaRPr lang="en-US" sz="900" dirty="0"/>
           </a:p>
